--- a/downloads/slides/Lesson4_Slides.pptx
+++ b/downloads/slides/Lesson4_Slides.pptx
@@ -945,7 +945,7 @@
           <a:p>
             <a:r>
               <a:rPr lang="en-US" dirty="0"/>
-              <a:t>Step 3 · 6:18–6:30 · Listening (L4_listening.mp3, about 1:40). Before you listen: show a woman at a bus stop on the phone: "Who is she calling? Why?"</a:t>
+              <a:t>Step 3 · 6:18–6:30 · Listening (L4_listening.mp3, about 1:06). Before you listen: show a woman at a bus stop on the phone: "Who is she calling? Why?"</a:t>
             </a:r>
           </a:p>
           <a:p>
